--- a/ABD-Tema-4/Actividad 4.3 Banco de ejercicios_AmauryGordillo_ABD_6ISCM.pptx
+++ b/ABD-Tema-4/Actividad 4.3 Banco de ejercicios_AmauryGordillo_ABD_6ISCM.pptx
@@ -5,7 +5,7 @@
     <p:sldMasterId id="2147483648" r:id="rId1"/>
   </p:sldMasterIdLst>
   <p:notesMasterIdLst>
-    <p:notesMasterId r:id="rId20"/>
+    <p:notesMasterId r:id="rId19"/>
   </p:notesMasterIdLst>
   <p:sldIdLst>
     <p:sldId id="277" r:id="rId2"/>
@@ -23,9 +23,8 @@
     <p:sldId id="268" r:id="rId14"/>
     <p:sldId id="269" r:id="rId15"/>
     <p:sldId id="270" r:id="rId16"/>
-    <p:sldId id="278" r:id="rId17"/>
-    <p:sldId id="279" r:id="rId18"/>
-    <p:sldId id="271" r:id="rId19"/>
+    <p:sldId id="279" r:id="rId17"/>
+    <p:sldId id="271" r:id="rId18"/>
   </p:sldIdLst>
   <p:sldSz cx="12188825" cy="6858000"/>
   <p:notesSz cx="6858000" cy="9144000"/>
@@ -225,7 +224,7 @@
           <a:p>
             <a:fld id="{4565AF85-41C9-41D2-AB00-B16BE34AFA28}" type="datetimeFigureOut">
               <a:rPr lang="es-MX" smtClean="0"/>
-              <a:t>31/05/2026</a:t>
+              <a:t>12/06/2026</a:t>
             </a:fld>
             <a:endParaRPr lang="es-MX"/>
           </a:p>
@@ -890,7 +889,7 @@
           <a:p>
             <a:fld id="{5BCAD085-E8A6-8845-BD4E-CB4CCA059FC4}" type="datetimeFigureOut">
               <a:rPr lang="en-US" smtClean="0"/>
-              <a:t>5/31/2026</a:t>
+              <a:t>6/12/2026</a:t>
             </a:fld>
             <a:endParaRPr lang="en-US"/>
           </a:p>
@@ -1058,7 +1057,7 @@
           <a:p>
             <a:fld id="{5BCAD085-E8A6-8845-BD4E-CB4CCA059FC4}" type="datetimeFigureOut">
               <a:rPr lang="en-US" smtClean="0"/>
-              <a:t>5/31/2026</a:t>
+              <a:t>6/12/2026</a:t>
             </a:fld>
             <a:endParaRPr lang="en-US"/>
           </a:p>
@@ -1236,7 +1235,7 @@
           <a:p>
             <a:fld id="{5BCAD085-E8A6-8845-BD4E-CB4CCA059FC4}" type="datetimeFigureOut">
               <a:rPr lang="en-US" smtClean="0"/>
-              <a:t>5/31/2026</a:t>
+              <a:t>6/12/2026</a:t>
             </a:fld>
             <a:endParaRPr lang="en-US"/>
           </a:p>
@@ -1404,7 +1403,7 @@
           <a:p>
             <a:fld id="{5BCAD085-E8A6-8845-BD4E-CB4CCA059FC4}" type="datetimeFigureOut">
               <a:rPr lang="en-US" smtClean="0"/>
-              <a:t>5/31/2026</a:t>
+              <a:t>6/12/2026</a:t>
             </a:fld>
             <a:endParaRPr lang="en-US"/>
           </a:p>
@@ -1649,7 +1648,7 @@
           <a:p>
             <a:fld id="{5BCAD085-E8A6-8845-BD4E-CB4CCA059FC4}" type="datetimeFigureOut">
               <a:rPr lang="en-US" smtClean="0"/>
-              <a:t>5/31/2026</a:t>
+              <a:t>6/12/2026</a:t>
             </a:fld>
             <a:endParaRPr lang="en-US"/>
           </a:p>
@@ -1934,7 +1933,7 @@
           <a:p>
             <a:fld id="{5BCAD085-E8A6-8845-BD4E-CB4CCA059FC4}" type="datetimeFigureOut">
               <a:rPr lang="en-US" smtClean="0"/>
-              <a:t>5/31/2026</a:t>
+              <a:t>6/12/2026</a:t>
             </a:fld>
             <a:endParaRPr lang="en-US"/>
           </a:p>
@@ -2353,7 +2352,7 @@
           <a:p>
             <a:fld id="{5BCAD085-E8A6-8845-BD4E-CB4CCA059FC4}" type="datetimeFigureOut">
               <a:rPr lang="en-US" smtClean="0"/>
-              <a:t>5/31/2026</a:t>
+              <a:t>6/12/2026</a:t>
             </a:fld>
             <a:endParaRPr lang="en-US"/>
           </a:p>
@@ -2470,7 +2469,7 @@
           <a:p>
             <a:fld id="{5BCAD085-E8A6-8845-BD4E-CB4CCA059FC4}" type="datetimeFigureOut">
               <a:rPr lang="en-US" smtClean="0"/>
-              <a:t>5/31/2026</a:t>
+              <a:t>6/12/2026</a:t>
             </a:fld>
             <a:endParaRPr lang="en-US"/>
           </a:p>
@@ -2565,7 +2564,7 @@
           <a:p>
             <a:fld id="{5BCAD085-E8A6-8845-BD4E-CB4CCA059FC4}" type="datetimeFigureOut">
               <a:rPr lang="en-US" smtClean="0"/>
-              <a:t>5/31/2026</a:t>
+              <a:t>6/12/2026</a:t>
             </a:fld>
             <a:endParaRPr lang="en-US"/>
           </a:p>
@@ -2840,7 +2839,7 @@
           <a:p>
             <a:fld id="{5BCAD085-E8A6-8845-BD4E-CB4CCA059FC4}" type="datetimeFigureOut">
               <a:rPr lang="en-US" smtClean="0"/>
-              <a:t>5/31/2026</a:t>
+              <a:t>6/12/2026</a:t>
             </a:fld>
             <a:endParaRPr lang="en-US"/>
           </a:p>
@@ -3092,7 +3091,7 @@
           <a:p>
             <a:fld id="{5BCAD085-E8A6-8845-BD4E-CB4CCA059FC4}" type="datetimeFigureOut">
               <a:rPr lang="en-US" smtClean="0"/>
-              <a:t>5/31/2026</a:t>
+              <a:t>6/12/2026</a:t>
             </a:fld>
             <a:endParaRPr lang="en-US"/>
           </a:p>
@@ -3303,7 +3302,7 @@
           <a:p>
             <a:fld id="{5BCAD085-E8A6-8845-BD4E-CB4CCA059FC4}" type="datetimeFigureOut">
               <a:rPr lang="en-US" smtClean="0"/>
-              <a:t>5/31/2026</a:t>
+              <a:t>6/12/2026</a:t>
             </a:fld>
             <a:endParaRPr lang="en-US"/>
           </a:p>
@@ -9438,171 +9437,13 @@
       </p:sp>
       <p:sp>
         <p:nvSpPr>
-          <p:cNvPr id="8" name="Rectangle 7"/>
-          <p:cNvSpPr/>
-          <p:nvPr/>
-        </p:nvSpPr>
-        <p:spPr>
-          <a:xfrm>
-            <a:off x="548640" y="1097280"/>
-            <a:ext cx="11109960" cy="1371600"/>
-          </a:xfrm>
-          <a:prstGeom prst="rect">
-            <a:avLst/>
-          </a:prstGeom>
-          <a:solidFill>
-            <a:srgbClr val="0A2845"/>
-          </a:solidFill>
-          <a:ln>
-            <a:noFill/>
-          </a:ln>
-        </p:spPr>
-        <p:style>
-          <a:lnRef idx="1">
-            <a:schemeClr val="accent1"/>
-          </a:lnRef>
-          <a:fillRef idx="3">
-            <a:schemeClr val="accent1"/>
-          </a:fillRef>
-          <a:effectRef idx="2">
-            <a:schemeClr val="accent1"/>
-          </a:effectRef>
-          <a:fontRef idx="minor">
-            <a:schemeClr val="lt1"/>
-          </a:fontRef>
-        </p:style>
-        <p:txBody>
-          <a:bodyPr rtlCol="0" anchor="ctr"/>
-          <a:lstStyle/>
-          <a:p>
-            <a:pPr algn="ctr"/>
-            <a:endParaRPr/>
-          </a:p>
-        </p:txBody>
-      </p:sp>
-      <p:sp>
-        <p:nvSpPr>
-          <p:cNvPr id="9" name="Rectangle 8"/>
-          <p:cNvSpPr/>
-          <p:nvPr/>
-        </p:nvSpPr>
-        <p:spPr>
-          <a:xfrm>
-            <a:off x="548640" y="1097280"/>
-            <a:ext cx="91440" cy="1371600"/>
-          </a:xfrm>
-          <a:prstGeom prst="rect">
-            <a:avLst/>
-          </a:prstGeom>
-          <a:solidFill>
-            <a:srgbClr val="2E7D32"/>
-          </a:solidFill>
-          <a:ln>
-            <a:noFill/>
-          </a:ln>
-        </p:spPr>
-        <p:style>
-          <a:lnRef idx="1">
-            <a:schemeClr val="accent1"/>
-          </a:lnRef>
-          <a:fillRef idx="3">
-            <a:schemeClr val="accent1"/>
-          </a:fillRef>
-          <a:effectRef idx="2">
-            <a:schemeClr val="accent1"/>
-          </a:effectRef>
-          <a:fontRef idx="minor">
-            <a:schemeClr val="lt1"/>
-          </a:fontRef>
-        </p:style>
-        <p:txBody>
-          <a:bodyPr rtlCol="0" anchor="ctr"/>
-          <a:lstStyle/>
-          <a:p>
-            <a:pPr algn="ctr"/>
-            <a:endParaRPr/>
-          </a:p>
-        </p:txBody>
-      </p:sp>
-      <p:sp>
-        <p:nvSpPr>
-          <p:cNvPr id="10" name="TextBox 9"/>
-          <p:cNvSpPr txBox="1"/>
-          <p:nvPr/>
-        </p:nvSpPr>
-        <p:spPr>
-          <a:xfrm>
-            <a:off x="822960" y="1143000"/>
-            <a:ext cx="10515600" cy="347472"/>
-          </a:xfrm>
-          <a:prstGeom prst="rect">
-            <a:avLst/>
-          </a:prstGeom>
-          <a:noFill/>
-        </p:spPr>
-        <p:txBody>
-          <a:bodyPr wrap="square">
-            <a:spAutoFit/>
-          </a:bodyPr>
-          <a:lstStyle/>
-          <a:p>
-            <a:pPr algn="l"/>
-            <a:r>
-              <a:rPr sz="1300" b="1" i="0">
-                <a:solidFill>
-                  <a:srgbClr val="2E7D32"/>
-                </a:solidFill>
-                <a:latin typeface="Calibri"/>
-              </a:rPr>
-              <a:t>URL del Repositorio GitHub:</a:t>
-            </a:r>
-          </a:p>
-        </p:txBody>
-      </p:sp>
-      <p:sp>
-        <p:nvSpPr>
-          <p:cNvPr id="11" name="TextBox 10"/>
-          <p:cNvSpPr txBox="1"/>
-          <p:nvPr/>
-        </p:nvSpPr>
-        <p:spPr>
-          <a:xfrm>
-            <a:off x="822960" y="1463040"/>
-            <a:ext cx="10515600" cy="411480"/>
-          </a:xfrm>
-          <a:prstGeom prst="rect">
-            <a:avLst/>
-          </a:prstGeom>
-          <a:noFill/>
-        </p:spPr>
-        <p:txBody>
-          <a:bodyPr wrap="square">
-            <a:spAutoFit/>
-          </a:bodyPr>
-          <a:lstStyle/>
-          <a:p>
-            <a:pPr algn="l"/>
-            <a:r>
-              <a:rPr sz="1600" b="1" i="0">
-                <a:solidFill>
-                  <a:srgbClr val="FFFFFF"/>
-                </a:solidFill>
-                <a:latin typeface="Calibri"/>
-              </a:rPr>
-              <a:t>https://github.com/amaurycolochos-cpu/ADMINISTRACION-BASE-DE-DATOS</a:t>
-            </a:r>
-          </a:p>
-        </p:txBody>
-      </p:sp>
-      <p:sp>
-        <p:nvSpPr>
           <p:cNvPr id="12" name="Rectangle 11"/>
           <p:cNvSpPr/>
           <p:nvPr/>
         </p:nvSpPr>
         <p:spPr>
           <a:xfrm>
-            <a:off x="548640" y="2651760"/>
+            <a:off x="539432" y="1947672"/>
             <a:ext cx="11109960" cy="1005840"/>
           </a:xfrm>
           <a:prstGeom prst="rect">
@@ -9646,7 +9487,7 @@
         </p:nvSpPr>
         <p:spPr>
           <a:xfrm>
-            <a:off x="548640" y="2651760"/>
+            <a:off x="539432" y="1947672"/>
             <a:ext cx="91440" cy="1005840"/>
           </a:xfrm>
           <a:prstGeom prst="rect">
@@ -9690,7 +9531,7 @@
         </p:nvSpPr>
         <p:spPr>
           <a:xfrm>
-            <a:off x="822960" y="2697480"/>
+            <a:off x="813752" y="1993392"/>
             <a:ext cx="10515600" cy="320040"/>
           </a:xfrm>
           <a:prstGeom prst="rect">
@@ -9725,8 +9566,8 @@
         </p:nvSpPr>
         <p:spPr>
           <a:xfrm>
-            <a:off x="822960" y="2999232"/>
-            <a:ext cx="10515600" cy="502920"/>
+            <a:off x="813752" y="2295144"/>
+            <a:ext cx="10515600" cy="553998"/>
           </a:xfrm>
           <a:prstGeom prst="rect">
             <a:avLst/>
@@ -9741,632 +9582,15 @@
           <a:p>
             <a:pPr algn="l"/>
             <a:r>
-              <a:rPr sz="1500" b="1" i="0">
+              <a:rPr lang="es-MX" sz="1500" b="1" i="0" dirty="0">
                 <a:solidFill>
                   <a:srgbClr val="FFFFFF"/>
                 </a:solidFill>
                 <a:latin typeface="Calibri"/>
-              </a:rPr>
-              <a:t>ADMINISTRACION-BASE-DE-DATOS / UNIDAD 4 / abd-microservicios</a:t>
-            </a:r>
-          </a:p>
-        </p:txBody>
-      </p:sp>
-      <p:sp>
-        <p:nvSpPr>
-          <p:cNvPr id="16" name="TextBox 15"/>
-          <p:cNvSpPr txBox="1"/>
-          <p:nvPr/>
-        </p:nvSpPr>
-        <p:spPr>
-          <a:xfrm>
-            <a:off x="548640" y="3822191"/>
-            <a:ext cx="10515600" cy="347472"/>
-          </a:xfrm>
-          <a:prstGeom prst="rect">
-            <a:avLst/>
-          </a:prstGeom>
-          <a:noFill/>
-        </p:spPr>
-        <p:txBody>
-          <a:bodyPr wrap="square">
-            <a:spAutoFit/>
-          </a:bodyPr>
-          <a:lstStyle/>
-          <a:p>
-            <a:pPr algn="l"/>
-            <a:r>
-              <a:rPr sz="1300" b="1" i="0">
-                <a:solidFill>
-                  <a:srgbClr val="2E7D32"/>
-                </a:solidFill>
-                <a:latin typeface="Calibri"/>
-              </a:rPr>
-              <a:t>Estructura del proyecto subido:</a:t>
-            </a:r>
-          </a:p>
-        </p:txBody>
-      </p:sp>
-      <p:sp>
-        <p:nvSpPr>
-          <p:cNvPr id="17" name="TextBox 16"/>
-          <p:cNvSpPr txBox="1"/>
-          <p:nvPr/>
-        </p:nvSpPr>
-        <p:spPr>
-          <a:xfrm>
-            <a:off x="548640" y="4160520"/>
-            <a:ext cx="11109960" cy="2377440"/>
-          </a:xfrm>
-          <a:prstGeom prst="rect">
-            <a:avLst/>
-          </a:prstGeom>
-          <a:noFill/>
-        </p:spPr>
-        <p:txBody>
-          <a:bodyPr wrap="square">
-            <a:spAutoFit/>
-          </a:bodyPr>
-          <a:lstStyle/>
-          <a:p>
-            <a:pPr algn="l">
-              <a:spcBef>
-                <a:spcPts val="300"/>
-              </a:spcBef>
-            </a:pPr>
-            <a:r>
-              <a:rPr sz="1250" b="0">
-                <a:solidFill>
-                  <a:srgbClr val="BBDEFF"/>
-                </a:solidFill>
-                <a:latin typeface="Calibri"/>
-              </a:rPr>
-              <a:t>abd-microservicios/</a:t>
-            </a:r>
-          </a:p>
-          <a:p>
-            <a:pPr algn="l">
-              <a:spcBef>
-                <a:spcPts val="300"/>
-              </a:spcBef>
-            </a:pPr>
-            <a:r>
-              <a:rPr sz="1250" b="0">
-                <a:solidFill>
-                  <a:srgbClr val="BBDEFF"/>
-                </a:solidFill>
-                <a:latin typeface="Calibri"/>
-              </a:rPr>
-              <a:t>  ├─ config-server/     → Servidor de configuración centralizada (puerto 8888)</a:t>
-            </a:r>
-          </a:p>
-          <a:p>
-            <a:pPr algn="l">
-              <a:spcBef>
-                <a:spcPts val="300"/>
-              </a:spcBef>
-            </a:pPr>
-            <a:r>
-              <a:rPr sz="1250" b="0">
-                <a:solidFill>
-                  <a:srgbClr val="BBDEFF"/>
-                </a:solidFill>
-                <a:latin typeface="Calibri"/>
-              </a:rPr>
-              <a:t>  ├─ eureka-server/     → Registro y descubrimiento de servicios (puerto 8761)</a:t>
-            </a:r>
-          </a:p>
-          <a:p>
-            <a:pPr algn="l">
-              <a:spcBef>
-                <a:spcPts val="300"/>
-              </a:spcBef>
-            </a:pPr>
-            <a:r>
-              <a:rPr sz="1250" b="0">
-                <a:solidFill>
-                  <a:srgbClr val="BBDEFF"/>
-                </a:solidFill>
-                <a:latin typeface="Calibri"/>
-              </a:rPr>
-              <a:t>  ├─ api-gateway/       → Punto de entrada único (puerto 8090)</a:t>
-            </a:r>
-          </a:p>
-          <a:p>
-            <a:pPr algn="l">
-              <a:spcBef>
-                <a:spcPts val="300"/>
-              </a:spcBef>
-            </a:pPr>
-            <a:r>
-              <a:rPr sz="1250" b="0">
-                <a:solidFill>
-                  <a:srgbClr val="BBDEFF"/>
-                </a:solidFill>
-                <a:latin typeface="Calibri"/>
-              </a:rPr>
-              <a:t>  ├─ student-service/   → Microservicio estudiantes + MySQL (puerto 8080)</a:t>
-            </a:r>
-          </a:p>
-          <a:p>
-            <a:pPr algn="l">
-              <a:spcBef>
-                <a:spcPts val="300"/>
-              </a:spcBef>
-            </a:pPr>
-            <a:r>
-              <a:rPr sz="1250" b="0">
-                <a:solidFill>
-                  <a:srgbClr val="BBDEFF"/>
-                </a:solidFill>
-                <a:latin typeface="Calibri"/>
-              </a:rPr>
-              <a:t>  ├─ course-service/    → Microservicio cursos + MySQL (puerto 8081)</a:t>
-            </a:r>
-          </a:p>
-          <a:p>
-            <a:pPr algn="l">
-              <a:spcBef>
-                <a:spcPts val="300"/>
-              </a:spcBef>
-            </a:pPr>
-            <a:r>
-              <a:rPr sz="1250" b="0">
-                <a:solidFill>
-                  <a:srgbClr val="BBDEFF"/>
-                </a:solidFill>
-                <a:latin typeface="Calibri"/>
-              </a:rPr>
-              <a:t>  └─ pom.xml            → Proyecto Maven multi-módulo</a:t>
-            </a:r>
-          </a:p>
-        </p:txBody>
-      </p:sp>
-    </p:spTree>
-  </p:cSld>
-  <p:clrMapOvr>
-    <a:masterClrMapping/>
-  </p:clrMapOvr>
-</p:sld>
-</file>
-
-<file path=ppt/slides/slide17.xml><?xml version="1.0" encoding="utf-8"?>
-<p:sld xmlns:a="http://schemas.openxmlformats.org/drawingml/2006/main" xmlns:r="http://schemas.openxmlformats.org/officeDocument/2006/relationships" xmlns:p="http://schemas.openxmlformats.org/presentationml/2006/main">
-  <p:cSld>
-    <p:spTree>
-      <p:nvGrpSpPr>
-        <p:cNvPr id="1" name=""/>
-        <p:cNvGrpSpPr/>
-        <p:nvPr/>
-      </p:nvGrpSpPr>
-      <p:grpSpPr>
-        <a:xfrm>
-          <a:off x="0" y="0"/>
-          <a:ext cx="0" cy="0"/>
-          <a:chOff x="0" y="0"/>
-          <a:chExt cx="0" cy="0"/>
-        </a:xfrm>
-      </p:grpSpPr>
-      <p:sp>
-        <p:nvSpPr>
-          <p:cNvPr id="2" name="Rectangle 1"/>
-          <p:cNvSpPr/>
-          <p:nvPr/>
-        </p:nvSpPr>
-        <p:spPr>
-          <a:xfrm>
-            <a:off x="0" y="0"/>
-            <a:ext cx="12188952" cy="6858000"/>
-          </a:xfrm>
-          <a:prstGeom prst="rect">
-            <a:avLst/>
-          </a:prstGeom>
-          <a:solidFill>
-            <a:srgbClr val="0D1B2A"/>
-          </a:solidFill>
-          <a:ln>
-            <a:noFill/>
-          </a:ln>
-        </p:spPr>
-        <p:style>
-          <a:lnRef idx="1">
-            <a:schemeClr val="accent1"/>
-          </a:lnRef>
-          <a:fillRef idx="3">
-            <a:schemeClr val="accent1"/>
-          </a:fillRef>
-          <a:effectRef idx="2">
-            <a:schemeClr val="accent1"/>
-          </a:effectRef>
-          <a:fontRef idx="minor">
-            <a:schemeClr val="lt1"/>
-          </a:fontRef>
-        </p:style>
-        <p:txBody>
-          <a:bodyPr rtlCol="0" anchor="ctr"/>
-          <a:lstStyle/>
-          <a:p>
-            <a:pPr algn="ctr"/>
-            <a:endParaRPr/>
-          </a:p>
-        </p:txBody>
-      </p:sp>
-      <p:sp>
-        <p:nvSpPr>
-          <p:cNvPr id="3" name="Rectangle 2"/>
-          <p:cNvSpPr/>
-          <p:nvPr/>
-        </p:nvSpPr>
-        <p:spPr>
-          <a:xfrm>
-            <a:off x="0" y="0"/>
-            <a:ext cx="201168" cy="6858000"/>
-          </a:xfrm>
-          <a:prstGeom prst="rect">
-            <a:avLst/>
-          </a:prstGeom>
-          <a:solidFill>
-            <a:srgbClr val="007ACC"/>
-          </a:solidFill>
-          <a:ln>
-            <a:noFill/>
-          </a:ln>
-        </p:spPr>
-        <p:style>
-          <a:lnRef idx="1">
-            <a:schemeClr val="accent1"/>
-          </a:lnRef>
-          <a:fillRef idx="3">
-            <a:schemeClr val="accent1"/>
-          </a:fillRef>
-          <a:effectRef idx="2">
-            <a:schemeClr val="accent1"/>
-          </a:effectRef>
-          <a:fontRef idx="minor">
-            <a:schemeClr val="lt1"/>
-          </a:fontRef>
-        </p:style>
-        <p:txBody>
-          <a:bodyPr rtlCol="0" anchor="ctr"/>
-          <a:lstStyle/>
-          <a:p>
-            <a:pPr algn="ctr"/>
-            <a:endParaRPr/>
-          </a:p>
-        </p:txBody>
-      </p:sp>
-      <p:sp>
-        <p:nvSpPr>
-          <p:cNvPr id="4" name="Rectangle 3"/>
-          <p:cNvSpPr/>
-          <p:nvPr/>
-        </p:nvSpPr>
-        <p:spPr>
-          <a:xfrm>
-            <a:off x="201168" y="0"/>
-            <a:ext cx="54864" cy="6858000"/>
-          </a:xfrm>
-          <a:prstGeom prst="rect">
-            <a:avLst/>
-          </a:prstGeom>
-          <a:solidFill>
-            <a:srgbClr val="2E7D32"/>
-          </a:solidFill>
-          <a:ln>
-            <a:noFill/>
-          </a:ln>
-        </p:spPr>
-        <p:style>
-          <a:lnRef idx="1">
-            <a:schemeClr val="accent1"/>
-          </a:lnRef>
-          <a:fillRef idx="3">
-            <a:schemeClr val="accent1"/>
-          </a:fillRef>
-          <a:effectRef idx="2">
-            <a:schemeClr val="accent1"/>
-          </a:effectRef>
-          <a:fontRef idx="minor">
-            <a:schemeClr val="lt1"/>
-          </a:fontRef>
-        </p:style>
-        <p:txBody>
-          <a:bodyPr rtlCol="0" anchor="ctr"/>
-          <a:lstStyle/>
-          <a:p>
-            <a:pPr algn="ctr"/>
-            <a:endParaRPr/>
-          </a:p>
-        </p:txBody>
-      </p:sp>
-      <p:sp>
-        <p:nvSpPr>
-          <p:cNvPr id="5" name="Rectangle 4"/>
-          <p:cNvSpPr/>
-          <p:nvPr/>
-        </p:nvSpPr>
-        <p:spPr>
-          <a:xfrm>
-            <a:off x="256032" y="0"/>
-            <a:ext cx="11932920" cy="54864"/>
-          </a:xfrm>
-          <a:prstGeom prst="rect">
-            <a:avLst/>
-          </a:prstGeom>
-          <a:solidFill>
-            <a:srgbClr val="2E7D32"/>
-          </a:solidFill>
-          <a:ln>
-            <a:noFill/>
-          </a:ln>
-        </p:spPr>
-        <p:style>
-          <a:lnRef idx="1">
-            <a:schemeClr val="accent1"/>
-          </a:lnRef>
-          <a:fillRef idx="3">
-            <a:schemeClr val="accent1"/>
-          </a:fillRef>
-          <a:effectRef idx="2">
-            <a:schemeClr val="accent1"/>
-          </a:effectRef>
-          <a:fontRef idx="minor">
-            <a:schemeClr val="lt1"/>
-          </a:fontRef>
-        </p:style>
-        <p:txBody>
-          <a:bodyPr rtlCol="0" anchor="ctr"/>
-          <a:lstStyle/>
-          <a:p>
-            <a:pPr algn="ctr"/>
-            <a:endParaRPr/>
-          </a:p>
-        </p:txBody>
-      </p:sp>
-      <p:sp>
-        <p:nvSpPr>
-          <p:cNvPr id="6" name="TextBox 5"/>
-          <p:cNvSpPr txBox="1"/>
-          <p:nvPr/>
-        </p:nvSpPr>
-        <p:spPr>
-          <a:xfrm>
-            <a:off x="548640" y="274320"/>
-            <a:ext cx="10058400" cy="594360"/>
-          </a:xfrm>
-          <a:prstGeom prst="rect">
-            <a:avLst/>
-          </a:prstGeom>
-          <a:noFill/>
-        </p:spPr>
-        <p:txBody>
-          <a:bodyPr wrap="square">
-            <a:spAutoFit/>
-          </a:bodyPr>
-          <a:lstStyle/>
-          <a:p>
-            <a:pPr algn="l"/>
-            <a:r>
-              <a:rPr sz="3000" b="1" i="0">
-                <a:solidFill>
-                  <a:srgbClr val="FFFFFF"/>
-                </a:solidFill>
-                <a:latin typeface="Calibri"/>
-              </a:rPr>
-              <a:t>Repositorio del Proyecto</a:t>
-            </a:r>
-          </a:p>
-        </p:txBody>
-      </p:sp>
-      <p:sp>
-        <p:nvSpPr>
-          <p:cNvPr id="7" name="Rectangle 6"/>
-          <p:cNvSpPr/>
-          <p:nvPr/>
-        </p:nvSpPr>
-        <p:spPr>
-          <a:xfrm>
-            <a:off x="548640" y="868680"/>
-            <a:ext cx="7315200" cy="36576"/>
-          </a:xfrm>
-          <a:prstGeom prst="rect">
-            <a:avLst/>
-          </a:prstGeom>
-          <a:solidFill>
-            <a:srgbClr val="2E7D32"/>
-          </a:solidFill>
-          <a:ln>
-            <a:noFill/>
-          </a:ln>
-        </p:spPr>
-        <p:style>
-          <a:lnRef idx="1">
-            <a:schemeClr val="accent1"/>
-          </a:lnRef>
-          <a:fillRef idx="3">
-            <a:schemeClr val="accent1"/>
-          </a:fillRef>
-          <a:effectRef idx="2">
-            <a:schemeClr val="accent1"/>
-          </a:effectRef>
-          <a:fontRef idx="minor">
-            <a:schemeClr val="lt1"/>
-          </a:fontRef>
-        </p:style>
-        <p:txBody>
-          <a:bodyPr rtlCol="0" anchor="ctr"/>
-          <a:lstStyle/>
-          <a:p>
-            <a:pPr algn="ctr"/>
-            <a:endParaRPr/>
-          </a:p>
-        </p:txBody>
-      </p:sp>
-      <p:sp>
-        <p:nvSpPr>
-          <p:cNvPr id="12" name="Rectangle 11"/>
-          <p:cNvSpPr/>
-          <p:nvPr/>
-        </p:nvSpPr>
-        <p:spPr>
-          <a:xfrm>
-            <a:off x="539432" y="1947672"/>
-            <a:ext cx="11109960" cy="1005840"/>
-          </a:xfrm>
-          <a:prstGeom prst="rect">
-            <a:avLst/>
-          </a:prstGeom>
-          <a:solidFill>
-            <a:srgbClr val="0D3055"/>
-          </a:solidFill>
-          <a:ln>
-            <a:noFill/>
-          </a:ln>
-        </p:spPr>
-        <p:style>
-          <a:lnRef idx="1">
-            <a:schemeClr val="accent1"/>
-          </a:lnRef>
-          <a:fillRef idx="3">
-            <a:schemeClr val="accent1"/>
-          </a:fillRef>
-          <a:effectRef idx="2">
-            <a:schemeClr val="accent1"/>
-          </a:effectRef>
-          <a:fontRef idx="minor">
-            <a:schemeClr val="lt1"/>
-          </a:fontRef>
-        </p:style>
-        <p:txBody>
-          <a:bodyPr rtlCol="0" anchor="ctr"/>
-          <a:lstStyle/>
-          <a:p>
-            <a:pPr algn="ctr"/>
-            <a:endParaRPr/>
-          </a:p>
-        </p:txBody>
-      </p:sp>
-      <p:sp>
-        <p:nvSpPr>
-          <p:cNvPr id="13" name="Rectangle 12"/>
-          <p:cNvSpPr/>
-          <p:nvPr/>
-        </p:nvSpPr>
-        <p:spPr>
-          <a:xfrm>
-            <a:off x="539432" y="1947672"/>
-            <a:ext cx="91440" cy="1005840"/>
-          </a:xfrm>
-          <a:prstGeom prst="rect">
-            <a:avLst/>
-          </a:prstGeom>
-          <a:solidFill>
-            <a:srgbClr val="007ACC"/>
-          </a:solidFill>
-          <a:ln>
-            <a:noFill/>
-          </a:ln>
-        </p:spPr>
-        <p:style>
-          <a:lnRef idx="1">
-            <a:schemeClr val="accent1"/>
-          </a:lnRef>
-          <a:fillRef idx="3">
-            <a:schemeClr val="accent1"/>
-          </a:fillRef>
-          <a:effectRef idx="2">
-            <a:schemeClr val="accent1"/>
-          </a:effectRef>
-          <a:fontRef idx="minor">
-            <a:schemeClr val="lt1"/>
-          </a:fontRef>
-        </p:style>
-        <p:txBody>
-          <a:bodyPr rtlCol="0" anchor="ctr"/>
-          <a:lstStyle/>
-          <a:p>
-            <a:pPr algn="ctr"/>
-            <a:endParaRPr/>
-          </a:p>
-        </p:txBody>
-      </p:sp>
-      <p:sp>
-        <p:nvSpPr>
-          <p:cNvPr id="14" name="TextBox 13"/>
-          <p:cNvSpPr txBox="1"/>
-          <p:nvPr/>
-        </p:nvSpPr>
-        <p:spPr>
-          <a:xfrm>
-            <a:off x="813752" y="1993392"/>
-            <a:ext cx="10515600" cy="320040"/>
-          </a:xfrm>
-          <a:prstGeom prst="rect">
-            <a:avLst/>
-          </a:prstGeom>
-          <a:noFill/>
-        </p:spPr>
-        <p:txBody>
-          <a:bodyPr wrap="square">
-            <a:spAutoFit/>
-          </a:bodyPr>
-          <a:lstStyle/>
-          <a:p>
-            <a:pPr algn="l"/>
-            <a:r>
-              <a:rPr sz="1200" b="1" i="0">
-                <a:solidFill>
-                  <a:srgbClr val="80FFA0"/>
-                </a:solidFill>
-                <a:latin typeface="Calibri"/>
-              </a:rPr>
-              <a:t>Ubicación en el repositorio:</a:t>
-            </a:r>
-          </a:p>
-        </p:txBody>
-      </p:sp>
-      <p:sp>
-        <p:nvSpPr>
-          <p:cNvPr id="15" name="TextBox 14"/>
-          <p:cNvSpPr txBox="1"/>
-          <p:nvPr/>
-        </p:nvSpPr>
-        <p:spPr>
-          <a:xfrm>
-            <a:off x="813752" y="2295144"/>
-            <a:ext cx="10515600" cy="553998"/>
-          </a:xfrm>
-          <a:prstGeom prst="rect">
-            <a:avLst/>
-          </a:prstGeom>
-          <a:noFill/>
-        </p:spPr>
-        <p:txBody>
-          <a:bodyPr wrap="square">
-            <a:spAutoFit/>
-          </a:bodyPr>
-          <a:lstStyle/>
-          <a:p>
-            <a:pPr algn="l"/>
-            <a:r>
-              <a:rPr lang="es-MX" sz="1500" b="1" i="0" dirty="0">
-                <a:solidFill>
-                  <a:srgbClr val="FFFFFF"/>
-                </a:solidFill>
-                <a:latin typeface="Calibri"/>
                 <a:hlinkClick r:id="rId2"/>
               </a:rPr>
-              <a:t>https://github.com/amaurycolochos-cpu/ADMINISTRACION-BASE-DE-DATOS/tree/master/UNIDAD%204/abd-microservicios</a:t>
-            </a:r>
-            <a:endParaRPr lang="es-MX" sz="1500" b="1" dirty="0">
-              <a:solidFill>
-                <a:srgbClr val="FFFFFF"/>
-              </a:solidFill>
-              <a:latin typeface="Calibri"/>
-            </a:endParaRPr>
-          </a:p>
-          <a:p>
-            <a:pPr algn="l"/>
+              <a:t>https://github.com/amaurycolochos-cpu/ADMINISTRACION-BASE-DE-DATOS/tree/master/ABD-Tema-4</a:t>
+            </a:r>
             <a:endParaRPr lang="es-MX" sz="1500" b="1" i="0" dirty="0">
               <a:solidFill>
                 <a:srgbClr val="FFFFFF"/>
@@ -10374,175 +9598,14 @@
               <a:latin typeface="Calibri"/>
             </a:endParaRPr>
           </a:p>
-        </p:txBody>
-      </p:sp>
-      <p:sp>
-        <p:nvSpPr>
-          <p:cNvPr id="16" name="TextBox 15"/>
-          <p:cNvSpPr txBox="1"/>
-          <p:nvPr/>
-        </p:nvSpPr>
-        <p:spPr>
-          <a:xfrm>
-            <a:off x="548640" y="3822191"/>
-            <a:ext cx="10515600" cy="347472"/>
-          </a:xfrm>
-          <a:prstGeom prst="rect">
-            <a:avLst/>
-          </a:prstGeom>
-          <a:noFill/>
-        </p:spPr>
-        <p:txBody>
-          <a:bodyPr wrap="square">
-            <a:spAutoFit/>
-          </a:bodyPr>
-          <a:lstStyle/>
           <a:p>
             <a:pPr algn="l"/>
-            <a:r>
-              <a:rPr sz="1300" b="1" i="0">
-                <a:solidFill>
-                  <a:srgbClr val="2E7D32"/>
-                </a:solidFill>
-                <a:latin typeface="Calibri"/>
-              </a:rPr>
-              <a:t>Estructura del proyecto subido:</a:t>
-            </a:r>
-          </a:p>
-        </p:txBody>
-      </p:sp>
-      <p:sp>
-        <p:nvSpPr>
-          <p:cNvPr id="17" name="TextBox 16"/>
-          <p:cNvSpPr txBox="1"/>
-          <p:nvPr/>
-        </p:nvSpPr>
-        <p:spPr>
-          <a:xfrm>
-            <a:off x="548640" y="4160520"/>
-            <a:ext cx="11109960" cy="2377440"/>
-          </a:xfrm>
-          <a:prstGeom prst="rect">
-            <a:avLst/>
-          </a:prstGeom>
-          <a:noFill/>
-        </p:spPr>
-        <p:txBody>
-          <a:bodyPr wrap="square">
-            <a:spAutoFit/>
-          </a:bodyPr>
-          <a:lstStyle/>
-          <a:p>
-            <a:pPr algn="l">
-              <a:spcBef>
-                <a:spcPts val="300"/>
-              </a:spcBef>
-            </a:pPr>
-            <a:r>
-              <a:rPr sz="1250" b="0">
-                <a:solidFill>
-                  <a:srgbClr val="BBDEFF"/>
-                </a:solidFill>
-                <a:latin typeface="Calibri"/>
-              </a:rPr>
-              <a:t>abd-microservicios/</a:t>
-            </a:r>
-          </a:p>
-          <a:p>
-            <a:pPr algn="l">
-              <a:spcBef>
-                <a:spcPts val="300"/>
-              </a:spcBef>
-            </a:pPr>
-            <a:r>
-              <a:rPr sz="1250" b="0">
-                <a:solidFill>
-                  <a:srgbClr val="BBDEFF"/>
-                </a:solidFill>
-                <a:latin typeface="Calibri"/>
-              </a:rPr>
-              <a:t>  ├─ config-server/     → Servidor de configuración centralizada (puerto 8888)</a:t>
-            </a:r>
-          </a:p>
-          <a:p>
-            <a:pPr algn="l">
-              <a:spcBef>
-                <a:spcPts val="300"/>
-              </a:spcBef>
-            </a:pPr>
-            <a:r>
-              <a:rPr sz="1250" b="0">
-                <a:solidFill>
-                  <a:srgbClr val="BBDEFF"/>
-                </a:solidFill>
-                <a:latin typeface="Calibri"/>
-              </a:rPr>
-              <a:t>  ├─ eureka-server/     → Registro y descubrimiento de servicios (puerto 8761)</a:t>
-            </a:r>
-          </a:p>
-          <a:p>
-            <a:pPr algn="l">
-              <a:spcBef>
-                <a:spcPts val="300"/>
-              </a:spcBef>
-            </a:pPr>
-            <a:r>
-              <a:rPr sz="1250" b="0">
-                <a:solidFill>
-                  <a:srgbClr val="BBDEFF"/>
-                </a:solidFill>
-                <a:latin typeface="Calibri"/>
-              </a:rPr>
-              <a:t>  ├─ api-gateway/       → Punto de entrada único (puerto 8090)</a:t>
-            </a:r>
-          </a:p>
-          <a:p>
-            <a:pPr algn="l">
-              <a:spcBef>
-                <a:spcPts val="300"/>
-              </a:spcBef>
-            </a:pPr>
-            <a:r>
-              <a:rPr sz="1250" b="0">
-                <a:solidFill>
-                  <a:srgbClr val="BBDEFF"/>
-                </a:solidFill>
-                <a:latin typeface="Calibri"/>
-              </a:rPr>
-              <a:t>  ├─ student-service/   → Microservicio estudiantes + MySQL (puerto 8080)</a:t>
-            </a:r>
-          </a:p>
-          <a:p>
-            <a:pPr algn="l">
-              <a:spcBef>
-                <a:spcPts val="300"/>
-              </a:spcBef>
-            </a:pPr>
-            <a:r>
-              <a:rPr sz="1250" b="0">
-                <a:solidFill>
-                  <a:srgbClr val="BBDEFF"/>
-                </a:solidFill>
-                <a:latin typeface="Calibri"/>
-              </a:rPr>
-              <a:t>  ├─ course-service/    → Microservicio cursos + MySQL (puerto 8081)</a:t>
-            </a:r>
-          </a:p>
-          <a:p>
-            <a:pPr algn="l">
-              <a:spcBef>
-                <a:spcPts val="300"/>
-              </a:spcBef>
-            </a:pPr>
-            <a:r>
-              <a:rPr sz="1250" b="0">
-                <a:solidFill>
-                  <a:srgbClr val="BBDEFF"/>
-                </a:solidFill>
-                <a:latin typeface="Calibri"/>
-              </a:rPr>
-              <a:t>  └─ pom.xml            → Proyecto Maven multi-módulo</a:t>
-            </a:r>
+            <a:endParaRPr lang="es-MX" sz="1500" b="1" i="0" dirty="0">
+              <a:solidFill>
+                <a:schemeClr val="bg2"/>
+              </a:solidFill>
+              <a:latin typeface="Calibri"/>
+            </a:endParaRPr>
           </a:p>
         </p:txBody>
       </p:sp>
@@ -10559,7 +9622,7 @@
 </p:sld>
 </file>
 
-<file path=ppt/slides/slide18.xml><?xml version="1.0" encoding="utf-8"?>
+<file path=ppt/slides/slide17.xml><?xml version="1.0" encoding="utf-8"?>
 <p:sld xmlns:a="http://schemas.openxmlformats.org/drawingml/2006/main" xmlns:r="http://schemas.openxmlformats.org/officeDocument/2006/relationships" xmlns:p="http://schemas.openxmlformats.org/presentationml/2006/main">
   <p:cSld>
     <p:spTree>
